--- a/docs/onboarding/02-ticket.pptx
+++ b/docs/onboarding/02-ticket.pptx
@@ -1462,7 +1462,7 @@
                 <a:ea typeface="Arial" pitchFamily="34" charset="-122"/>
                 <a:cs typeface="Arial" pitchFamily="34" charset="-120"/>
               </a:rPr>
-              <a:t>TRADE-IMPORTS-ANIMALS ONBOARDING</a:t>
+              <a:t>TRADE-IMPORTS WORKSPACE ONBOARDING</a:t>
             </a:r>
             <a:endParaRPr lang="en-US" sz="1400" dirty="0"/>
           </a:p>
@@ -1751,7 +1751,7 @@
                 <a:ea typeface="Arial" pitchFamily="34" charset="-122"/>
                 <a:cs typeface="Arial" pitchFamily="34" charset="-120"/>
               </a:rPr>
-              <a:t>A ticket rarely lives in one repo. Before you write a line you're piecing together its Jira description and comments, any Confluence design notes, which of the eight repos and which stacks it touches, and the conventions each repo expects. That context-gathering is slow, easy to get wrong, and different every time.</a:t>
+              <a:t>A ticket rarely lives in one repo. Before you write a line you're piecing together its Jira description and comments, any Confluence design notes, which repos and which stacks it touches, and the conventions each repo expects. That context-gathering is slow, easy to get wrong, and different every time.</a:t>
             </a:r>
             <a:endParaRPr lang="en-US" sz="1550" dirty="0"/>
           </a:p>
@@ -2203,7 +2203,7 @@
                 <a:ea typeface="Arial" pitchFamily="34" charset="-122"/>
                 <a:cs typeface="Arial" pitchFamily="34" charset="-120"/>
               </a:rPr>
-              <a:t>trade-imports-animals onboarding</a:t>
+              <a:t>trade-imports workspace onboarding</a:t>
             </a:r>
             <a:endParaRPr lang="en-US" sz="900" dirty="0"/>
           </a:p>
@@ -2824,7 +2824,7 @@
                 <a:ea typeface="Arial" pitchFamily="34" charset="-122"/>
                 <a:cs typeface="Arial" pitchFamily="34" charset="-120"/>
               </a:rPr>
-              <a:t>trade-imports-animals onboarding</a:t>
+              <a:t>trade-imports workspace onboarding</a:t>
             </a:r>
             <a:endParaRPr lang="en-US" sz="900" dirty="0"/>
           </a:p>
@@ -3870,7 +3870,7 @@
                 <a:ea typeface="Arial" pitchFamily="34" charset="-122"/>
                 <a:cs typeface="Arial" pitchFamily="34" charset="-120"/>
               </a:rPr>
-              <a:t>trade-imports-animals onboarding</a:t>
+              <a:t>trade-imports workspace onboarding</a:t>
             </a:r>
             <a:endParaRPr lang="en-US" sz="900" dirty="0"/>
           </a:p>
@@ -4589,7 +4589,7 @@
                 <a:ea typeface="Arial" pitchFamily="34" charset="-122"/>
                 <a:cs typeface="Arial" pitchFamily="34" charset="-120"/>
               </a:rPr>
-              <a:t>trade-imports-animals onboarding</a:t>
+              <a:t>trade-imports workspace onboarding</a:t>
             </a:r>
             <a:endParaRPr lang="en-US" sz="900" dirty="0"/>
           </a:p>
@@ -5151,7 +5151,7 @@
                 <a:ea typeface="Arial" pitchFamily="34" charset="-122"/>
                 <a:cs typeface="Arial" pitchFamily="34" charset="-120"/>
               </a:rPr>
-              <a:t>trade-imports-animals onboarding</a:t>
+              <a:t>trade-imports workspace onboarding</a:t>
             </a:r>
             <a:endParaRPr lang="en-US" sz="900" dirty="0"/>
           </a:p>
